--- a/slides/study-roadmap/study-roadmap.pptx
+++ b/slides/study-roadmap/study-roadmap.pptx
@@ -793,7 +793,7 @@
           <a:lstStyle/>
           <a:p>
             <a:r>
-              <a:t>순서는 세 원칙으로 정했다. 첫째, 파이프라인의 흐름을 따른다. 인식의 비용 지도가 계획의 입력이고, 계획의 경로가 제어의 입력이다. 둘째, 고전 방법을 먼저 본다. 고전 방법은 보장과 실패 양상이 분명해서, 학습 방법을 평가하는 기준이 된다. 셋째, 여러 분야를 섞는 다리 로봇은 마지막에 둔다. 다만 이 순서가 유일한 답은 아니며, 목적에 따라 줄인 경로를 뒤에서 따로 제안한다.</a:t>
+              <a:t>순서는 세 원칙으로 정했다. 첫째, 파이프라인의 흐름을 따른다. 인식의 costmap이 계획의 입력이고, 계획의 경로가 제어의 입력이다. 둘째, 고전 방법을 먼저 본다. 고전 방법은 보장과 실패 양상이 분명해서, 학습 방법을 평가하는 기준이 된다. 셋째, 여러 분야를 섞는 다리 로봇은 마지막에 둔다. 다만 이 순서가 유일한 답은 아니며, 목적에 따라 줄인 경로를 뒤에서 따로 제안한다.</a:t>
             </a:r>
           </a:p>
         </p:txBody>
@@ -863,7 +863,7 @@
           <a:lstStyle/>
           <a:p>
             <a:r>
-              <a:t>위 줄의 네 덱은 차례로 이어진다. 인식이 비용 지도를 만들고, 계획이 그 위에서 경로를 찾고, 제어가 경로를 따라가며, 비선형 MPC는 제어 덱 2장의 이동 지평 제어를 깊게 판다. 아래 줄은 학습이다. 강화학습의 PPO가 시뮬레이션의 병렬 학습으로, 무작위화가 다리 로봇의 실물 이전으로 이어진다. 점선 셋은 덱을 가로지르는 연결이다. 경로 계획 덱의 학습·생성 Planner 장은 강화학습 덱의 모방학습과 flow 정책을 알면 훨씬 쉽다. MPPI는 강화학습 덱의 추론으로서의 제어와 같은 식이다. MPC의 제약은 다리 로봇 덱의 투영으로 다시 나온다.</a:t>
+              <a:t>위 줄의 네 덱은 차례로 이어진다. 인식이 costmap을 만들고, 계획이 그 위에서 경로를 찾고, 제어가 경로를 따라가며, 비선형 MPC는 제어 덱 2장의 receding horizon 제어를 깊게 다룬다. 아래 줄은 학습이다. 강화학습의 PPO가 시뮬레이션의 병렬 학습으로, 도메인 랜덤화가 다리 로봇의 sim-to-real로 이어진다. 점선 셋은 덱을 가로지르는 연결이다. 경로 계획 덱의 학습·생성 Planner 장은 강화학습 덱의 모방학습과 flow 정책을 알면 훨씬 쉽다. MPPI는 강화학습 덱의 control as inference(추론으로서의 제어)와 같은 식이다. MPC의 제약은 다리 로봇 덱의 투영으로 다시 나온다.</a:t>
             </a:r>
           </a:p>
         </p:txBody>
@@ -5060,7 +5060,7 @@
         </p:nvGraphicFramePr>
         <p:xfrm>
           <a:off x="711200" y="1361678"/>
-          <a:ext cx="10769600" cy="2166421"/>
+          <a:ext cx="10769599" cy="2166421"/>
         </p:xfrm>
         <a:graphic>
           <a:graphicData uri="http://schemas.openxmlformats.org/drawingml/2006/table">
@@ -5069,9 +5069,9 @@
                 <a:tableStyleId>{5C22544A-7EE6-4342-B048-85BDC9FD1C3A}</a:tableStyleId>
               </a:tblPr>
               <a:tblGrid>
-                <a:gridCol w="1434108"/>
-                <a:gridCol w="3902968"/>
-                <a:gridCol w="5432524"/>
+                <a:gridCol w="1410196"/>
+                <a:gridCol w="3837880"/>
+                <a:gridCol w="5521523"/>
               </a:tblGrid>
               <a:tr h="278224">
                 <a:tc>
@@ -5284,7 +5284,7 @@
                           <a:ea typeface="Malgun Gothic"/>
                           <a:cs typeface="Malgun Gothic"/>
                         </a:rPr>
-                        <a:t>휴리스틱 가중치에 따라 확장 칸 수와 경로 길이가 어떻게 바뀌나</a:t>
+                        <a:t>휴리스틱 가중치에 따라 확장 노드 수와 경로 길이가 어떻게 바뀌나</a:t>
                       </a:r>
                     </a:p>
                   </a:txBody>
@@ -5506,7 +5506,7 @@
                           <a:ea typeface="Malgun Gothic"/>
                           <a:cs typeface="Malgun Gothic"/>
                         </a:rPr>
-                        <a:t>기준선이 분산을 얼마나 줄이나</a:t>
+                        <a:t>baseline이 분산을 얼마나 줄이나</a:t>
                       </a:r>
                     </a:p>
                   </a:txBody>
@@ -6681,7 +6681,7 @@
                 <a:ea typeface="Malgun Gothic"/>
                 <a:cs typeface="Malgun Gothic"/>
               </a:rPr>
-              <a:t>지도 갱신 + 계획 + 추종, 또는 시뮬에서 PPO 정책 학습 + 무작위화. 엮을 때 덱 사이의 화살표가 손에 잡힌다.</a:t>
+              <a:t>지도 갱신 + 계획 + 추종, 또는 시뮬에서 PPO 정책 학습 + 도메인 랜덤화. 엮을 때 덱 사이의 화살표가 손에 잡힌다.</a:t>
             </a:r>
           </a:p>
         </p:txBody>
@@ -8889,7 +8889,7 @@
                 <a:ea typeface="Malgun Gothic"/>
                 <a:cs typeface="Malgun Gothic"/>
               </a:rPr>
-              <a:t>탐색·되먹임·최적화의 보장을 알아야 학습 방법이 무엇을 버리고 무엇을 얻는지 판단할 수 있다. 그래서 강화학습은 제어와 MPC 뒤에 둔다.</a:t>
+              <a:t>탐색·피드백·최적화의 보장을 알아야 학습 방법이 무엇을 버리고 무엇을 얻는지 판단할 수 있다. 그래서 강화학습은 제어와 MPC 뒤에 둔다.</a:t>
             </a:r>
           </a:p>
         </p:txBody>
@@ -14051,7 +14051,7 @@
                           <a:ea typeface="Malgun Gothic"/>
                           <a:cs typeface="Malgun Gothic"/>
                         </a:rPr>
-                        <a:t>되먹임·안정성·PID 장</a:t>
+                        <a:t>피드백·안정성·PID 장</a:t>
                       </a:r>
                     </a:p>
                   </a:txBody>
